--- a/classes/parte-1-redes-y-seguridad-de-redes/037-proxies-nat-y-pivoting-de-red/clase-037-presentacion.pptx
+++ b/classes/parte-1-redes-y-seguridad-de-redes/037-proxies-nat-y-pivoting-de-red/clase-037-presentacion.pptx
@@ -17,6 +17,9 @@
     <p:sldId id="265" r:id="rId16"/>
     <p:sldId id="266" r:id="rId17"/>
     <p:sldId id="267" r:id="rId18"/>
+    <p:sldId id="268" r:id="rId19"/>
+    <p:sldId id="269" r:id="rId20"/>
+    <p:sldId id="270" r:id="rId21"/>
   </p:sldIdLst>
   <p:sldSz cx="9144000" cy="6858000" type="screen4x3"/>
   <p:notesSz cx="6858000" cy="9144000"/>
@@ -3198,7 +3201,7 @@
                   <a:srgbClr val="0B3D2E"/>
                 </a:solidFill>
               </a:rPr>
-              <a:t>⚠️ Errores comunes</a:t>
+              <a:t>✍️ Ejercicios</a:t>
             </a:r>
           </a:p>
         </p:txBody>
@@ -3236,67 +3239,82 @@
                   <a:srgbClr val="22282E"/>
                 </a:solidFill>
               </a:rPr>
-              <a:t>•  proxychains "denied" o sin salida — Puerto SOCKS mal configurado; verifica que -D 1080 está activo y coincide con el conf</a:t>
-            </a:r>
-          </a:p>
-          <a:p>
-            <a:pPr>
-              <a:spcAft>
-                <a:spcPts val="600"/>
-              </a:spcAft>
-            </a:pPr>
-            <a:r>
-              <a:rPr sz="1500">
-                <a:solidFill>
-                  <a:srgbClr val="22282E"/>
-                </a:solidFill>
-              </a:rPr>
-              <a:t>•  Nmap por proxychains no ve nada — Usaste -sS (raw no funciona por SOCKS); usa -sT -Pn</a:t>
-            </a:r>
-          </a:p>
-          <a:p>
-            <a:pPr>
-              <a:spcAft>
-                <a:spcPts val="600"/>
-              </a:spcAft>
-            </a:pPr>
-            <a:r>
-              <a:rPr sz="1500">
-                <a:solidFill>
-                  <a:srgbClr val="22282E"/>
-                </a:solidFill>
-              </a:rPr>
-              <a:t>•  -R no expone el puerto — Falta GatewayPorts yes en el sshd del pivote</a:t>
-            </a:r>
-          </a:p>
-          <a:p>
-            <a:pPr>
-              <a:spcAft>
-                <a:spcPts val="600"/>
-              </a:spcAft>
-            </a:pPr>
-            <a:r>
-              <a:rPr sz="1500">
-                <a:solidFill>
-                  <a:srgbClr val="22282E"/>
-                </a:solidFill>
-              </a:rPr>
-              <a:t>•  Túnel se cae por inactividad — Añade ServerAliveInterval o usa autossh</a:t>
-            </a:r>
-          </a:p>
-          <a:p>
-            <a:pPr>
-              <a:spcAft>
-                <a:spcPts val="600"/>
-              </a:spcAft>
-            </a:pPr>
-            <a:r>
-              <a:rPr sz="1500">
-                <a:solidFill>
-                  <a:srgbClr val="22282E"/>
-                </a:solidFill>
-              </a:rPr>
-              <a:t>•  DNS no resuelve por el túnel — proxychains no proxifica DNS UDP por defecto; usa proxydns o resuelve por IP</a:t>
+              <a:t>•  Alcanza un servicio web de la red interna únicamente con un túnel -L.</a:t>
+            </a:r>
+          </a:p>
+          <a:p>
+            <a:pPr>
+              <a:spcAft>
+                <a:spcPts val="600"/>
+              </a:spcAft>
+            </a:pPr>
+            <a:r>
+              <a:rPr sz="1500">
+                <a:solidFill>
+                  <a:srgbClr val="22282E"/>
+                </a:solidFill>
+              </a:rPr>
+              <a:t>•  Usa -D + proxychains para escanear la red interna con Nmap (-sT, sin raw).</a:t>
+            </a:r>
+          </a:p>
+          <a:p>
+            <a:pPr>
+              <a:spcAft>
+                <a:spcPts val="600"/>
+              </a:spcAft>
+            </a:pPr>
+            <a:r>
+              <a:rPr sz="1500">
+                <a:solidFill>
+                  <a:srgbClr val="22282E"/>
+                </a:solidFill>
+              </a:rPr>
+              <a:t>•  Explica por qué con SOCKS conviene -sT y no -sS en Nmap.</a:t>
+            </a:r>
+          </a:p>
+          <a:p>
+            <a:pPr>
+              <a:spcAft>
+                <a:spcPts val="600"/>
+              </a:spcAft>
+            </a:pPr>
+            <a:r>
+              <a:rPr sz="1500">
+                <a:solidFill>
+                  <a:srgbClr val="22282E"/>
+                </a:solidFill>
+              </a:rPr>
+              <a:t>•  Configura un reenvío remoto -R y describe un caso legítimo de uso (administración).</a:t>
+            </a:r>
+          </a:p>
+          <a:p>
+            <a:pPr>
+              <a:spcAft>
+                <a:spcPts val="600"/>
+              </a:spcAft>
+            </a:pPr>
+            <a:r>
+              <a:rPr sz="1500">
+                <a:solidFill>
+                  <a:srgbClr val="22282E"/>
+                </a:solidFill>
+              </a:rPr>
+              <a:t>•  Con Chisel, establece un pivote cuando el pivote solo permite salida HTTP.</a:t>
+            </a:r>
+          </a:p>
+          <a:p>
+            <a:pPr>
+              <a:spcAft>
+                <a:spcPts val="600"/>
+              </a:spcAft>
+            </a:pPr>
+            <a:r>
+              <a:rPr sz="1500">
+                <a:solidFill>
+                  <a:srgbClr val="22282E"/>
+                </a:solidFill>
+              </a:rPr>
+              <a:t>•  Desde el lado azul, escribe una regla de firewall/IDS que detecte un túnel SOCKS sospechoso.</a:t>
             </a:r>
           </a:p>
         </p:txBody>
@@ -3347,7 +3365,7 @@
                   <a:srgbClr val="0B3D2E"/>
                 </a:solidFill>
               </a:rPr>
-              <a:t>❓ Preguntas frecuentes</a:t>
+              <a:t>📝 Reto verificable</a:t>
             </a:r>
           </a:p>
         </p:txBody>
@@ -3385,97 +3403,22 @@
                   <a:srgbClr val="22282E"/>
                 </a:solidFill>
               </a:rPr>
-              <a:t>•  ❓ ¿Qué diferencia hay entre -L y -R?</a:t>
-            </a:r>
-          </a:p>
-          <a:p>
-            <a:pPr>
-              <a:spcAft>
-                <a:spcPts val="600"/>
-              </a:spcAft>
-            </a:pPr>
-            <a:r>
-              <a:rPr sz="1500">
-                <a:solidFill>
-                  <a:srgbClr val="22282E"/>
-                </a:solidFill>
-              </a:rPr>
-              <a:t>•  -L reenvía un puerto local hacia un destino accesible desde el servidor SSH (acceso entrante a un servicio remoto). -R reenvía un puerto del servidor hacia un destino accesible desde tu máquina (útil para exponerte hacia dentro).</a:t>
-            </a:r>
-          </a:p>
-          <a:p>
-            <a:pPr>
-              <a:spcAft>
-                <a:spcPts val="600"/>
-              </a:spcAft>
-            </a:pPr>
-            <a:r>
-              <a:rPr sz="1500">
-                <a:solidFill>
-                  <a:srgbClr val="22282E"/>
-                </a:solidFill>
-              </a:rPr>
-              <a:t>•  ❓ ¿Por qué SOCKS y no un proxy HTTP?</a:t>
-            </a:r>
-          </a:p>
-          <a:p>
-            <a:pPr>
-              <a:spcAft>
-                <a:spcPts val="600"/>
-              </a:spcAft>
-            </a:pPr>
-            <a:r>
-              <a:rPr sz="1500">
-                <a:solidFill>
-                  <a:srgbClr val="22282E"/>
-                </a:solidFill>
-              </a:rPr>
-              <a:t>•  SOCKS es agnóstico al protocolo: túnela cualquier TCP (y SOCKS5 también UDP). Un proxy HTTP solo entiende HTTP.</a:t>
-            </a:r>
-          </a:p>
-          <a:p>
-            <a:pPr>
-              <a:spcAft>
-                <a:spcPts val="600"/>
-              </a:spcAft>
-            </a:pPr>
-            <a:r>
-              <a:rPr sz="1500">
-                <a:solidFill>
-                  <a:srgbClr val="22282E"/>
-                </a:solidFill>
-              </a:rPr>
-              <a:t>•  ❓ ¿El pivoting es siempre malicioso?</a:t>
-            </a:r>
-          </a:p>
-          <a:p>
-            <a:pPr>
-              <a:spcAft>
-                <a:spcPts val="600"/>
-              </a:spcAft>
-            </a:pPr>
-            <a:r>
-              <a:rPr sz="1500">
-                <a:solidFill>
-                  <a:srgbClr val="22282E"/>
-                </a:solidFill>
-              </a:rPr>
-              <a:t>•  No. Los administradores usan túneles SSH y bastiones legítimamente. La técnica es neutra; el contexto y la autorización determinan la legalidad.</a:t>
-            </a:r>
-          </a:p>
-          <a:p>
-            <a:pPr>
-              <a:spcAft>
-                <a:spcPts val="600"/>
-              </a:spcAft>
-            </a:pPr>
-            <a:r>
-              <a:rPr sz="1500">
-                <a:solidFill>
-                  <a:srgbClr val="22282E"/>
-                </a:solidFill>
-              </a:rPr>
-              <a:t>•  ❓ ¿Cómo se defiende una red del pivoting?</a:t>
+              <a:t>•  Partiendo de un host pivote con dos interfaces (una hacia ti, otra hacia una red interna aislada), establece un túnel que te permita escanear y acceder a un servicio de la red interna que no es…</a:t>
+            </a:r>
+          </a:p>
+          <a:p>
+            <a:pPr>
+              <a:spcAft>
+                <a:spcPts val="600"/>
+              </a:spcAft>
+            </a:pPr>
+            <a:r>
+              <a:rPr sz="1500">
+                <a:solidFill>
+                  <a:srgbClr val="22282E"/>
+                </a:solidFill>
+              </a:rPr>
+              <a:t>•  Criterio de aceptación: demuestras acceso a un servicio interno inaccesible sin el túnel, el escaneo por proxychains devuelve puertos de la red interna, y la explicación del recorrido del paquete es…</a:t>
             </a:r>
           </a:p>
         </p:txBody>
@@ -3526,7 +3469,7 @@
                   <a:srgbClr val="0B3D2E"/>
                 </a:solidFill>
               </a:rPr>
-              <a:t>🔗 Referencias</a:t>
+              <a:t>⚠️ Errores comunes</a:t>
             </a:r>
           </a:p>
         </p:txBody>
@@ -3564,6 +3507,334 @@
                   <a:srgbClr val="22282E"/>
                 </a:solidFill>
               </a:rPr>
+              <a:t>•  proxychains "denied" o sin salida — Puerto SOCKS mal configurado; verifica que -D 1080 está activo y coincide con el conf</a:t>
+            </a:r>
+          </a:p>
+          <a:p>
+            <a:pPr>
+              <a:spcAft>
+                <a:spcPts val="600"/>
+              </a:spcAft>
+            </a:pPr>
+            <a:r>
+              <a:rPr sz="1500">
+                <a:solidFill>
+                  <a:srgbClr val="22282E"/>
+                </a:solidFill>
+              </a:rPr>
+              <a:t>•  Nmap por proxychains no ve nada — Usaste -sS (raw no funciona por SOCKS); usa -sT -Pn</a:t>
+            </a:r>
+          </a:p>
+          <a:p>
+            <a:pPr>
+              <a:spcAft>
+                <a:spcPts val="600"/>
+              </a:spcAft>
+            </a:pPr>
+            <a:r>
+              <a:rPr sz="1500">
+                <a:solidFill>
+                  <a:srgbClr val="22282E"/>
+                </a:solidFill>
+              </a:rPr>
+              <a:t>•  -R no expone el puerto — Falta GatewayPorts yes en el sshd del pivote</a:t>
+            </a:r>
+          </a:p>
+          <a:p>
+            <a:pPr>
+              <a:spcAft>
+                <a:spcPts val="600"/>
+              </a:spcAft>
+            </a:pPr>
+            <a:r>
+              <a:rPr sz="1500">
+                <a:solidFill>
+                  <a:srgbClr val="22282E"/>
+                </a:solidFill>
+              </a:rPr>
+              <a:t>•  Túnel se cae por inactividad — Añade ServerAliveInterval o usa autossh</a:t>
+            </a:r>
+          </a:p>
+          <a:p>
+            <a:pPr>
+              <a:spcAft>
+                <a:spcPts val="600"/>
+              </a:spcAft>
+            </a:pPr>
+            <a:r>
+              <a:rPr sz="1500">
+                <a:solidFill>
+                  <a:srgbClr val="22282E"/>
+                </a:solidFill>
+              </a:rPr>
+              <a:t>•  DNS no resuelve por el túnel — proxychains no proxifica DNS UDP por defecto; usa proxydns o resuelve por IP</a:t>
+            </a:r>
+          </a:p>
+        </p:txBody>
+      </p:sp>
+    </p:spTree>
+  </p:cSld>
+  <p:clrMapOvr>
+    <a:masterClrMapping/>
+  </p:clrMapOvr>
+</p:sld>
+</file>
+
+<file path=ppt/slides/slide13.xml><?xml version="1.0" encoding="utf-8"?>
+<p:sld xmlns:a="http://schemas.openxmlformats.org/drawingml/2006/main" xmlns:p="http://schemas.openxmlformats.org/presentationml/2006/main" xmlns:r="http://schemas.openxmlformats.org/officeDocument/2006/relationships">
+  <p:cSld>
+    <p:spTree>
+      <p:nvGrpSpPr>
+        <p:cNvPr id="1" name=""/>
+        <p:cNvGrpSpPr/>
+        <p:nvPr/>
+      </p:nvGrpSpPr>
+      <p:grpSpPr/>
+      <p:sp>
+        <p:nvSpPr>
+          <p:cNvPr id="2" name="TextBox 1"/>
+          <p:cNvSpPr txBox="1"/>
+          <p:nvPr/>
+        </p:nvSpPr>
+        <p:spPr>
+          <a:xfrm>
+            <a:off x="457200" y="320040"/>
+            <a:ext cx="8229600" cy="822960"/>
+          </a:xfrm>
+          <a:prstGeom prst="rect">
+            <a:avLst/>
+          </a:prstGeom>
+          <a:noFill/>
+        </p:spPr>
+        <p:txBody>
+          <a:bodyPr wrap="square">
+            <a:spAutoFit/>
+          </a:bodyPr>
+          <a:lstStyle/>
+          <a:p>
+            <a:r>
+              <a:rPr sz="2600" b="1">
+                <a:solidFill>
+                  <a:srgbClr val="0B3D2E"/>
+                </a:solidFill>
+              </a:rPr>
+              <a:t>❓ Preguntas frecuentes</a:t>
+            </a:r>
+          </a:p>
+        </p:txBody>
+      </p:sp>
+      <p:sp>
+        <p:nvSpPr>
+          <p:cNvPr id="3" name="TextBox 2"/>
+          <p:cNvSpPr txBox="1"/>
+          <p:nvPr/>
+        </p:nvSpPr>
+        <p:spPr>
+          <a:xfrm>
+            <a:off x="457200" y="1280160"/>
+            <a:ext cx="8229600" cy="4937760"/>
+          </a:xfrm>
+          <a:prstGeom prst="rect">
+            <a:avLst/>
+          </a:prstGeom>
+          <a:noFill/>
+        </p:spPr>
+        <p:txBody>
+          <a:bodyPr wrap="square">
+            <a:spAutoFit/>
+          </a:bodyPr>
+          <a:lstStyle/>
+          <a:p>
+            <a:pPr>
+              <a:spcAft>
+                <a:spcPts val="600"/>
+              </a:spcAft>
+            </a:pPr>
+            <a:r>
+              <a:rPr sz="1500">
+                <a:solidFill>
+                  <a:srgbClr val="22282E"/>
+                </a:solidFill>
+              </a:rPr>
+              <a:t>•  ❓ ¿Qué diferencia hay entre -L y -R?</a:t>
+            </a:r>
+          </a:p>
+          <a:p>
+            <a:pPr>
+              <a:spcAft>
+                <a:spcPts val="600"/>
+              </a:spcAft>
+            </a:pPr>
+            <a:r>
+              <a:rPr sz="1500">
+                <a:solidFill>
+                  <a:srgbClr val="22282E"/>
+                </a:solidFill>
+              </a:rPr>
+              <a:t>•  -L reenvía un puerto local hacia un destino accesible desde el servidor SSH (acceso entrante a un servicio remoto). -R reenvía un puerto del servidor hacia un destino accesible desde tu máquina (útil…</a:t>
+            </a:r>
+          </a:p>
+          <a:p>
+            <a:pPr>
+              <a:spcAft>
+                <a:spcPts val="600"/>
+              </a:spcAft>
+            </a:pPr>
+            <a:r>
+              <a:rPr sz="1500">
+                <a:solidFill>
+                  <a:srgbClr val="22282E"/>
+                </a:solidFill>
+              </a:rPr>
+              <a:t>•  ❓ ¿Por qué SOCKS y no un proxy HTTP?</a:t>
+            </a:r>
+          </a:p>
+          <a:p>
+            <a:pPr>
+              <a:spcAft>
+                <a:spcPts val="600"/>
+              </a:spcAft>
+            </a:pPr>
+            <a:r>
+              <a:rPr sz="1500">
+                <a:solidFill>
+                  <a:srgbClr val="22282E"/>
+                </a:solidFill>
+              </a:rPr>
+              <a:t>•  SOCKS es agnóstico al protocolo: túnela cualquier TCP (y SOCKS5 también UDP). Un proxy HTTP solo entiende HTTP.</a:t>
+            </a:r>
+          </a:p>
+          <a:p>
+            <a:pPr>
+              <a:spcAft>
+                <a:spcPts val="600"/>
+              </a:spcAft>
+            </a:pPr>
+            <a:r>
+              <a:rPr sz="1500">
+                <a:solidFill>
+                  <a:srgbClr val="22282E"/>
+                </a:solidFill>
+              </a:rPr>
+              <a:t>•  ❓ ¿El pivoting es siempre malicioso?</a:t>
+            </a:r>
+          </a:p>
+          <a:p>
+            <a:pPr>
+              <a:spcAft>
+                <a:spcPts val="600"/>
+              </a:spcAft>
+            </a:pPr>
+            <a:r>
+              <a:rPr sz="1500">
+                <a:solidFill>
+                  <a:srgbClr val="22282E"/>
+                </a:solidFill>
+              </a:rPr>
+              <a:t>•  No. Los administradores usan túneles SSH y bastiones legítimamente. La técnica es neutra; el contexto y la autorización determinan la legalidad.</a:t>
+            </a:r>
+          </a:p>
+          <a:p>
+            <a:pPr>
+              <a:spcAft>
+                <a:spcPts val="600"/>
+              </a:spcAft>
+            </a:pPr>
+            <a:r>
+              <a:rPr sz="1500">
+                <a:solidFill>
+                  <a:srgbClr val="22282E"/>
+                </a:solidFill>
+              </a:rPr>
+              <a:t>•  ❓ ¿Cómo se defiende una red del pivoting?</a:t>
+            </a:r>
+          </a:p>
+        </p:txBody>
+      </p:sp>
+    </p:spTree>
+  </p:cSld>
+  <p:clrMapOvr>
+    <a:masterClrMapping/>
+  </p:clrMapOvr>
+</p:sld>
+</file>
+
+<file path=ppt/slides/slide14.xml><?xml version="1.0" encoding="utf-8"?>
+<p:sld xmlns:a="http://schemas.openxmlformats.org/drawingml/2006/main" xmlns:p="http://schemas.openxmlformats.org/presentationml/2006/main" xmlns:r="http://schemas.openxmlformats.org/officeDocument/2006/relationships">
+  <p:cSld>
+    <p:spTree>
+      <p:nvGrpSpPr>
+        <p:cNvPr id="1" name=""/>
+        <p:cNvGrpSpPr/>
+        <p:nvPr/>
+      </p:nvGrpSpPr>
+      <p:grpSpPr/>
+      <p:sp>
+        <p:nvSpPr>
+          <p:cNvPr id="2" name="TextBox 1"/>
+          <p:cNvSpPr txBox="1"/>
+          <p:nvPr/>
+        </p:nvSpPr>
+        <p:spPr>
+          <a:xfrm>
+            <a:off x="457200" y="320040"/>
+            <a:ext cx="8229600" cy="822960"/>
+          </a:xfrm>
+          <a:prstGeom prst="rect">
+            <a:avLst/>
+          </a:prstGeom>
+          <a:noFill/>
+        </p:spPr>
+        <p:txBody>
+          <a:bodyPr wrap="square">
+            <a:spAutoFit/>
+          </a:bodyPr>
+          <a:lstStyle/>
+          <a:p>
+            <a:r>
+              <a:rPr sz="2600" b="1">
+                <a:solidFill>
+                  <a:srgbClr val="0B3D2E"/>
+                </a:solidFill>
+              </a:rPr>
+              <a:t>🔗 Referencias</a:t>
+            </a:r>
+          </a:p>
+        </p:txBody>
+      </p:sp>
+      <p:sp>
+        <p:nvSpPr>
+          <p:cNvPr id="3" name="TextBox 2"/>
+          <p:cNvSpPr txBox="1"/>
+          <p:nvPr/>
+        </p:nvSpPr>
+        <p:spPr>
+          <a:xfrm>
+            <a:off x="457200" y="1280160"/>
+            <a:ext cx="8229600" cy="4937760"/>
+          </a:xfrm>
+          <a:prstGeom prst="rect">
+            <a:avLst/>
+          </a:prstGeom>
+          <a:noFill/>
+        </p:spPr>
+        <p:txBody>
+          <a:bodyPr wrap="square">
+            <a:spAutoFit/>
+          </a:bodyPr>
+          <a:lstStyle/>
+          <a:p>
+            <a:pPr>
+              <a:spcAft>
+                <a:spcPts val="600"/>
+              </a:spcAft>
+            </a:pPr>
+            <a:r>
+              <a:rPr sz="1500">
+                <a:solidFill>
+                  <a:srgbClr val="22282E"/>
+                </a:solidFill>
+              </a:rPr>
               <a:t>•  OpenSSH manual (port forwarding). &lt;https://man.openbsd.org/ssh#L&gt;</a:t>
             </a:r>
           </a:p>
@@ -3614,6 +3885,81 @@
           </a:p>
         </p:txBody>
       </p:sp>
+    </p:spTree>
+  </p:cSld>
+  <p:clrMapOvr>
+    <a:masterClrMapping/>
+  </p:clrMapOvr>
+</p:sld>
+</file>
+
+<file path=ppt/slides/slide15.xml><?xml version="1.0" encoding="utf-8"?>
+<p:sld xmlns:a="http://schemas.openxmlformats.org/drawingml/2006/main" xmlns:p="http://schemas.openxmlformats.org/presentationml/2006/main" xmlns:r="http://schemas.openxmlformats.org/officeDocument/2006/relationships">
+  <p:cSld>
+    <p:spTree>
+      <p:nvGrpSpPr>
+        <p:cNvPr id="1" name=""/>
+        <p:cNvGrpSpPr/>
+        <p:nvPr/>
+      </p:nvGrpSpPr>
+      <p:grpSpPr/>
+      <p:sp>
+        <p:nvSpPr>
+          <p:cNvPr id="2" name="TextBox 1"/>
+          <p:cNvSpPr txBox="1"/>
+          <p:nvPr/>
+        </p:nvSpPr>
+        <p:spPr>
+          <a:xfrm>
+            <a:off x="457200" y="274320"/>
+            <a:ext cx="8229600" cy="640080"/>
+          </a:xfrm>
+          <a:prstGeom prst="rect">
+            <a:avLst/>
+          </a:prstGeom>
+          <a:noFill/>
+        </p:spPr>
+        <p:txBody>
+          <a:bodyPr wrap="square">
+            <a:spAutoFit/>
+          </a:bodyPr>
+          <a:lstStyle/>
+          <a:p>
+            <a:r>
+              <a:rPr sz="2200" b="1">
+                <a:solidFill>
+                  <a:srgbClr val="0B3D2E"/>
+                </a:solidFill>
+              </a:rPr>
+              <a:t>Diagrama de la clase</a:t>
+            </a:r>
+          </a:p>
+        </p:txBody>
+      </p:sp>
+      <p:pic>
+        <p:nvPicPr>
+          <p:cNvPr id="3" name="Picture 2" descr="3cd176f151711a0f.png"/>
+          <p:cNvPicPr>
+            <a:picLocks noChangeAspect="1"/>
+          </p:cNvPicPr>
+          <p:nvPr/>
+        </p:nvPicPr>
+        <p:blipFill>
+          <a:blip r:embed="rId2"/>
+          <a:stretch>
+            <a:fillRect/>
+          </a:stretch>
+        </p:blipFill>
+        <p:spPr>
+          <a:xfrm>
+            <a:off x="457200" y="3058668"/>
+            <a:ext cx="8229600" cy="1380744"/>
+          </a:xfrm>
+          <a:prstGeom prst="rect">
+            <a:avLst/>
+          </a:prstGeom>
+        </p:spPr>
+      </p:pic>
     </p:spTree>
   </p:cSld>
   <p:clrMapOvr>
@@ -3698,7 +4044,7 @@
                   <a:srgbClr val="22282E"/>
                 </a:solidFill>
               </a:rPr>
-              <a:t>•  Entender NAT y proxies como piezas de red, y aprender la técnica ofensiva/defensiva del pivoting: usar un host comprometido como trampolín para alcanzar redes internas no accesibles directamente. El alumno practicará túneles SSH, reenvío de puertos, SOCKS y herramientas de pivoting en un laboratorio controlado.</a:t>
+              <a:t>•  Entender NAT y proxies como piezas de red, y aprender la técnica ofensiva/defensiva del pivoting: usar un host comprometido como trampolín para alcanzar redes internas no accesibles directamente. El…</a:t>
             </a:r>
           </a:p>
         </p:txBody>
@@ -4107,7 +4453,7 @@
                   <a:srgbClr val="0B3D2E"/>
                 </a:solidFill>
               </a:rPr>
-              <a:t>📖 Definiciones y características</a:t>
+              <a:t>🧠 Explicación en profundidad</a:t>
             </a:r>
           </a:p>
         </p:txBody>
@@ -4145,82 +4491,97 @@
                   <a:srgbClr val="22282E"/>
                 </a:solidFill>
               </a:rPr>
-              <a:t>•  NAT (Network Address Translation): traduce direcciones entre redes; PAT (overload) multiplexa muchos hosts internos tras una IP pública usando puertos.</a:t>
-            </a:r>
-          </a:p>
-          <a:p>
-            <a:pPr>
-              <a:spcAft>
-                <a:spcPts val="600"/>
-              </a:spcAft>
-            </a:pPr>
-            <a:r>
-              <a:rPr sz="1500">
-                <a:solidFill>
-                  <a:srgbClr val="22282E"/>
-                </a:solidFill>
-              </a:rPr>
-              <a:t>•  Proxy directo (forward): intermedia las peticiones salientes de clientes hacia Internet; puede filtrar y registrar.</a:t>
-            </a:r>
-          </a:p>
-          <a:p>
-            <a:pPr>
-              <a:spcAft>
-                <a:spcPts val="600"/>
-              </a:spcAft>
-            </a:pPr>
-            <a:r>
-              <a:rPr sz="1500">
-                <a:solidFill>
-                  <a:srgbClr val="22282E"/>
-                </a:solidFill>
-              </a:rPr>
-              <a:t>•  Proxy inverso (reverse): se coloca delante de servidores y distribuye/oculta el backend.</a:t>
-            </a:r>
-          </a:p>
-          <a:p>
-            <a:pPr>
-              <a:spcAft>
-                <a:spcPts val="600"/>
-              </a:spcAft>
-            </a:pPr>
-            <a:r>
-              <a:rPr sz="1500">
-                <a:solidFill>
-                  <a:srgbClr val="22282E"/>
-                </a:solidFill>
-              </a:rPr>
-              <a:t>•  Proxy SOCKS: proxy de nivel de sesión, agnóstico al protocolo de aplicación; ideal para túneles genéricos (SOCKS5).</a:t>
-            </a:r>
-          </a:p>
-          <a:p>
-            <a:pPr>
-              <a:spcAft>
-                <a:spcPts val="600"/>
-              </a:spcAft>
-            </a:pPr>
-            <a:r>
-              <a:rPr sz="1500">
-                <a:solidFill>
-                  <a:srgbClr val="22282E"/>
-                </a:solidFill>
-              </a:rPr>
-              <a:t>•  Pivoting: técnica de usar un host ya controlado como punto de apoyo para acceder a segmentos de red que no son alcanzables directamente desde el atacante.</a:t>
-            </a:r>
-          </a:p>
-          <a:p>
-            <a:pPr>
-              <a:spcAft>
-                <a:spcPts val="600"/>
-              </a:spcAft>
-            </a:pPr>
-            <a:r>
-              <a:rPr sz="1500">
-                <a:solidFill>
-                  <a:srgbClr val="22282E"/>
-                </a:solidFill>
-              </a:rPr>
-              <a:t>•  Túnel SSH dinámico (-D): abre un proxy SOCKS local que reenvía por SSH cualquier conexión al otro extremo.</a:t>
+              <a:t>•  NAT reescribe direcciones (y a menudo puertos) de los paquetes que cruzan un router,</a:t>
+            </a:r>
+          </a:p>
+          <a:p>
+            <a:pPr>
+              <a:spcAft>
+                <a:spcPts val="600"/>
+              </a:spcAft>
+            </a:pPr>
+            <a:r>
+              <a:rPr sz="1500">
+                <a:solidFill>
+                  <a:srgbClr val="22282E"/>
+                </a:solidFill>
+              </a:rPr>
+              <a:t>•  y entender sus tres variantes evita mucha confusión. SNAT cambia la dirección de</a:t>
+            </a:r>
+          </a:p>
+          <a:p>
+            <a:pPr>
+              <a:spcAft>
+                <a:spcPts val="600"/>
+              </a:spcAft>
+            </a:pPr>
+            <a:r>
+              <a:rPr sz="1500">
+                <a:solidFill>
+                  <a:srgbClr val="22282E"/>
+                </a:solidFill>
+              </a:rPr>
+              <a:t>•  origen: es lo que hace tu router doméstico para que muchos equipos con IP privada</a:t>
+            </a:r>
+          </a:p>
+          <a:p>
+            <a:pPr>
+              <a:spcAft>
+                <a:spcPts val="600"/>
+              </a:spcAft>
+            </a:pPr>
+            <a:r>
+              <a:rPr sz="1500">
+                <a:solidFill>
+                  <a:srgbClr val="22282E"/>
+                </a:solidFill>
+              </a:rPr>
+              <a:t>•  compartan una IP pública. DNAT cambia la de destino: es el port forwarding que</a:t>
+            </a:r>
+          </a:p>
+          <a:p>
+            <a:pPr>
+              <a:spcAft>
+                <a:spcPts val="600"/>
+              </a:spcAft>
+            </a:pPr>
+            <a:r>
+              <a:rPr sz="1500">
+                <a:solidFill>
+                  <a:srgbClr val="22282E"/>
+                </a:solidFill>
+              </a:rPr>
+              <a:t>•  publica un servidor interno hacia fuera. Y PAT —la forma habitual de SNAT— multiplexa</a:t>
+            </a:r>
+          </a:p>
+          <a:p>
+            <a:pPr>
+              <a:spcAft>
+                <a:spcPts val="600"/>
+              </a:spcAft>
+            </a:pPr>
+            <a:r>
+              <a:rPr sz="1500">
+                <a:solidFill>
+                  <a:srgbClr val="22282E"/>
+                </a:solidFill>
+              </a:rPr>
+              <a:t>•  por puerto de origen, de modo que el router recuerda en una tabla qué conexión interna</a:t>
+            </a:r>
+          </a:p>
+          <a:p>
+            <a:pPr>
+              <a:spcAft>
+                <a:spcPts val="600"/>
+              </a:spcAft>
+            </a:pPr>
+            <a:r>
+              <a:rPr sz="1500">
+                <a:solidFill>
+                  <a:srgbClr val="22282E"/>
+                </a:solidFill>
+              </a:rPr>
+              <a:t>•  corresponde a cada puerto reescrito y puede devolver las respuestas al equipo correcto.</a:t>
             </a:r>
           </a:p>
         </p:txBody>
@@ -4271,7 +4632,7 @@
                   <a:srgbClr val="0B3D2E"/>
                 </a:solidFill>
               </a:rPr>
-              <a:t>🧰 Herramientas y preparación</a:t>
+              <a:t>📖 Definiciones y características</a:t>
             </a:r>
           </a:p>
         </p:txBody>
@@ -4309,52 +4670,82 @@
                   <a:srgbClr val="22282E"/>
                 </a:solidFill>
               </a:rPr>
-              <a:t>•  OpenSSH (cliente y servidor).</a:t>
-            </a:r>
-          </a:p>
-          <a:p>
-            <a:pPr>
-              <a:spcAft>
-                <a:spcPts val="600"/>
-              </a:spcAft>
-            </a:pPr>
-            <a:r>
-              <a:rPr sz="1500">
-                <a:solidFill>
-                  <a:srgbClr val="22282E"/>
-                </a:solidFill>
-              </a:rPr>
-              <a:t>•  proxychains-ng: sudo apt install proxychains4.</a:t>
-            </a:r>
-          </a:p>
-          <a:p>
-            <a:pPr>
-              <a:spcAft>
-                <a:spcPts val="600"/>
-              </a:spcAft>
-            </a:pPr>
-            <a:r>
-              <a:rPr sz="1500">
-                <a:solidFill>
-                  <a:srgbClr val="22282E"/>
-                </a:solidFill>
-              </a:rPr>
-              <a:t>•  Chisel (túneles sobre HTTP/WebSocket) y socat para casos sin SSH.</a:t>
-            </a:r>
-          </a:p>
-          <a:p>
-            <a:pPr>
-              <a:spcAft>
-                <a:spcPts val="600"/>
-              </a:spcAft>
-            </a:pPr>
-            <a:r>
-              <a:rPr sz="1500">
-                <a:solidFill>
-                  <a:srgbClr val="22282E"/>
-                </a:solidFill>
-              </a:rPr>
-              <a:t>•  Laboratorio: atacante → host pivote (con dos interfaces) → red interna con una víctima solo alcanzable desde el pivote.</a:t>
+              <a:t>•  NAT (Network Address Translation): traduce direcciones entre redes; PAT (overload) multiplexa muchos hosts internos tras una IP pública usando puertos.</a:t>
+            </a:r>
+          </a:p>
+          <a:p>
+            <a:pPr>
+              <a:spcAft>
+                <a:spcPts val="600"/>
+              </a:spcAft>
+            </a:pPr>
+            <a:r>
+              <a:rPr sz="1500">
+                <a:solidFill>
+                  <a:srgbClr val="22282E"/>
+                </a:solidFill>
+              </a:rPr>
+              <a:t>•  Proxy directo (forward): intermedia las peticiones salientes de clientes hacia Internet; puede filtrar y registrar.</a:t>
+            </a:r>
+          </a:p>
+          <a:p>
+            <a:pPr>
+              <a:spcAft>
+                <a:spcPts val="600"/>
+              </a:spcAft>
+            </a:pPr>
+            <a:r>
+              <a:rPr sz="1500">
+                <a:solidFill>
+                  <a:srgbClr val="22282E"/>
+                </a:solidFill>
+              </a:rPr>
+              <a:t>•  Proxy inverso (reverse): se coloca delante de servidores y distribuye/oculta el backend.</a:t>
+            </a:r>
+          </a:p>
+          <a:p>
+            <a:pPr>
+              <a:spcAft>
+                <a:spcPts val="600"/>
+              </a:spcAft>
+            </a:pPr>
+            <a:r>
+              <a:rPr sz="1500">
+                <a:solidFill>
+                  <a:srgbClr val="22282E"/>
+                </a:solidFill>
+              </a:rPr>
+              <a:t>•  Proxy SOCKS: proxy de nivel de sesión, agnóstico al protocolo de aplicación; ideal para túneles genéricos (SOCKS5).</a:t>
+            </a:r>
+          </a:p>
+          <a:p>
+            <a:pPr>
+              <a:spcAft>
+                <a:spcPts val="600"/>
+              </a:spcAft>
+            </a:pPr>
+            <a:r>
+              <a:rPr sz="1500">
+                <a:solidFill>
+                  <a:srgbClr val="22282E"/>
+                </a:solidFill>
+              </a:rPr>
+              <a:t>•  Pivoting: técnica de usar un host ya controlado como punto de apoyo para acceder a segmentos de red que no son alcanzables directamente desde el atacante.</a:t>
+            </a:r>
+          </a:p>
+          <a:p>
+            <a:pPr>
+              <a:spcAft>
+                <a:spcPts val="600"/>
+              </a:spcAft>
+            </a:pPr>
+            <a:r>
+              <a:rPr sz="1500">
+                <a:solidFill>
+                  <a:srgbClr val="22282E"/>
+                </a:solidFill>
+              </a:rPr>
+              <a:t>•  Túnel SSH dinámico (-D): abre un proxy SOCKS local que reenvía por SSH cualquier conexión al otro extremo.</a:t>
             </a:r>
           </a:p>
         </p:txBody>
@@ -4405,7 +4796,7 @@
                   <a:srgbClr val="0B3D2E"/>
                 </a:solidFill>
               </a:rPr>
-              <a:t>🧪 Laboratorio guiado</a:t>
+              <a:t>📔 Glosario</a:t>
             </a:r>
           </a:p>
         </p:txBody>
@@ -4443,97 +4834,97 @@
                   <a:srgbClr val="22282E"/>
                 </a:solidFill>
               </a:rPr>
-              <a:t>•  Port forwarding local (-L): accede a un servicio del pivote/red interna como si fuera local:</a:t>
-            </a:r>
-          </a:p>
-          <a:p>
-            <a:pPr>
-              <a:spcAft>
-                <a:spcPts val="600"/>
-              </a:spcAft>
-            </a:pPr>
-            <a:r>
-              <a:rPr sz="1500">
-                <a:solidFill>
-                  <a:srgbClr val="22282E"/>
-                </a:solidFill>
-              </a:rPr>
-              <a:t>•  ssh -L 8080:10.20.0.5:80 usuario@pivote</a:t>
-            </a:r>
-          </a:p>
-          <a:p>
-            <a:pPr>
-              <a:spcAft>
-                <a:spcPts val="600"/>
-              </a:spcAft>
-            </a:pPr>
-            <a:r>
-              <a:rPr sz="1500">
-                <a:solidFill>
-                  <a:srgbClr val="22282E"/>
-                </a:solidFill>
-              </a:rPr>
-              <a:t>•  curl http://127.0.0.1:8080/</a:t>
-            </a:r>
-          </a:p>
-          <a:p>
-            <a:pPr>
-              <a:spcAft>
-                <a:spcPts val="600"/>
-              </a:spcAft>
-            </a:pPr>
-            <a:r>
-              <a:rPr sz="1500">
-                <a:solidFill>
-                  <a:srgbClr val="22282E"/>
-                </a:solidFill>
-              </a:rPr>
-              <a:t>•  Port forwarding remoto (-R): expón un servicio tuyo en el pivote (útil para reverse shells controladas):</a:t>
-            </a:r>
-          </a:p>
-          <a:p>
-            <a:pPr>
-              <a:spcAft>
-                <a:spcPts val="600"/>
-              </a:spcAft>
-            </a:pPr>
-            <a:r>
-              <a:rPr sz="1500">
-                <a:solidFill>
-                  <a:srgbClr val="22282E"/>
-                </a:solidFill>
-              </a:rPr>
-              <a:t>•  ssh -R 9000:127.0.0.1:80 usuario@pivote</a:t>
-            </a:r>
-          </a:p>
-          <a:p>
-            <a:pPr>
-              <a:spcAft>
-                <a:spcPts val="600"/>
-              </a:spcAft>
-            </a:pPr>
-            <a:r>
-              <a:rPr sz="1500">
-                <a:solidFill>
-                  <a:srgbClr val="22282E"/>
-                </a:solidFill>
-              </a:rPr>
-              <a:t>•  Túnel dinámico SOCKS (-D):</a:t>
-            </a:r>
-          </a:p>
-          <a:p>
-            <a:pPr>
-              <a:spcAft>
-                <a:spcPts val="600"/>
-              </a:spcAft>
-            </a:pPr>
-            <a:r>
-              <a:rPr sz="1500">
-                <a:solidFill>
-                  <a:srgbClr val="22282E"/>
-                </a:solidFill>
-              </a:rPr>
-              <a:t>•  ssh -D 1080 usuario@pivote</a:t>
+              <a:t>•  Término — Definición concisa</a:t>
+            </a:r>
+          </a:p>
+          <a:p>
+            <a:pPr>
+              <a:spcAft>
+                <a:spcPts val="600"/>
+              </a:spcAft>
+            </a:pPr>
+            <a:r>
+              <a:rPr sz="1500">
+                <a:solidFill>
+                  <a:srgbClr val="22282E"/>
+                </a:solidFill>
+              </a:rPr>
+              <a:t>•  NAT — Traducción de direcciones de red al cruzar un router</a:t>
+            </a:r>
+          </a:p>
+          <a:p>
+            <a:pPr>
+              <a:spcAft>
+                <a:spcPts val="600"/>
+              </a:spcAft>
+            </a:pPr>
+            <a:r>
+              <a:rPr sz="1500">
+                <a:solidFill>
+                  <a:srgbClr val="22282E"/>
+                </a:solidFill>
+              </a:rPr>
+              <a:t>•  SNAT — Reescribe la dirección de origen (salida de una red privada)</a:t>
+            </a:r>
+          </a:p>
+          <a:p>
+            <a:pPr>
+              <a:spcAft>
+                <a:spcPts val="600"/>
+              </a:spcAft>
+            </a:pPr>
+            <a:r>
+              <a:rPr sz="1500">
+                <a:solidFill>
+                  <a:srgbClr val="22282E"/>
+                </a:solidFill>
+              </a:rPr>
+              <a:t>•  DNAT — Reescribe la dirección de destino (port forwarding)</a:t>
+            </a:r>
+          </a:p>
+          <a:p>
+            <a:pPr>
+              <a:spcAft>
+                <a:spcPts val="600"/>
+              </a:spcAft>
+            </a:pPr>
+            <a:r>
+              <a:rPr sz="1500">
+                <a:solidFill>
+                  <a:srgbClr val="22282E"/>
+                </a:solidFill>
+              </a:rPr>
+              <a:t>•  PAT — SNAT multiplexado por puerto; la forma doméstica habitual</a:t>
+            </a:r>
+          </a:p>
+          <a:p>
+            <a:pPr>
+              <a:spcAft>
+                <a:spcPts val="600"/>
+              </a:spcAft>
+            </a:pPr>
+            <a:r>
+              <a:rPr sz="1500">
+                <a:solidFill>
+                  <a:srgbClr val="22282E"/>
+                </a:solidFill>
+              </a:rPr>
+              <a:t>•  Tabla de traducción — Registro que asocia cada conexión interna con su puerto reescrito</a:t>
+            </a:r>
+          </a:p>
+          <a:p>
+            <a:pPr>
+              <a:spcAft>
+                <a:spcPts val="600"/>
+              </a:spcAft>
+            </a:pPr>
+            <a:r>
+              <a:rPr sz="1500">
+                <a:solidFill>
+                  <a:srgbClr val="22282E"/>
+                </a:solidFill>
+              </a:rPr>
+              <a:t>•  Proxy — Intermediario que reenvía tráfico en nombre de otro</a:t>
             </a:r>
           </a:p>
         </p:txBody>
@@ -4584,7 +4975,7 @@
                   <a:srgbClr val="0B3D2E"/>
                 </a:solidFill>
               </a:rPr>
-              <a:t>✍️ Ejercicios</a:t>
+              <a:t>🧰 Herramientas y preparación</a:t>
             </a:r>
           </a:p>
         </p:txBody>
@@ -4622,82 +5013,52 @@
                   <a:srgbClr val="22282E"/>
                 </a:solidFill>
               </a:rPr>
-              <a:t>•  Alcanza un servicio web de la red interna únicamente con un túnel -L.</a:t>
-            </a:r>
-          </a:p>
-          <a:p>
-            <a:pPr>
-              <a:spcAft>
-                <a:spcPts val="600"/>
-              </a:spcAft>
-            </a:pPr>
-            <a:r>
-              <a:rPr sz="1500">
-                <a:solidFill>
-                  <a:srgbClr val="22282E"/>
-                </a:solidFill>
-              </a:rPr>
-              <a:t>•  Usa -D + proxychains para escanear la red interna con Nmap (-sT, sin raw).</a:t>
-            </a:r>
-          </a:p>
-          <a:p>
-            <a:pPr>
-              <a:spcAft>
-                <a:spcPts val="600"/>
-              </a:spcAft>
-            </a:pPr>
-            <a:r>
-              <a:rPr sz="1500">
-                <a:solidFill>
-                  <a:srgbClr val="22282E"/>
-                </a:solidFill>
-              </a:rPr>
-              <a:t>•  Explica por qué con SOCKS conviene -sT y no -sS en Nmap.</a:t>
-            </a:r>
-          </a:p>
-          <a:p>
-            <a:pPr>
-              <a:spcAft>
-                <a:spcPts val="600"/>
-              </a:spcAft>
-            </a:pPr>
-            <a:r>
-              <a:rPr sz="1500">
-                <a:solidFill>
-                  <a:srgbClr val="22282E"/>
-                </a:solidFill>
-              </a:rPr>
-              <a:t>•  Configura un reenvío remoto -R y describe un caso legítimo de uso (administración).</a:t>
-            </a:r>
-          </a:p>
-          <a:p>
-            <a:pPr>
-              <a:spcAft>
-                <a:spcPts val="600"/>
-              </a:spcAft>
-            </a:pPr>
-            <a:r>
-              <a:rPr sz="1500">
-                <a:solidFill>
-                  <a:srgbClr val="22282E"/>
-                </a:solidFill>
-              </a:rPr>
-              <a:t>•  Con Chisel, establece un pivote cuando el pivote solo permite salida HTTP.</a:t>
-            </a:r>
-          </a:p>
-          <a:p>
-            <a:pPr>
-              <a:spcAft>
-                <a:spcPts val="600"/>
-              </a:spcAft>
-            </a:pPr>
-            <a:r>
-              <a:rPr sz="1500">
-                <a:solidFill>
-                  <a:srgbClr val="22282E"/>
-                </a:solidFill>
-              </a:rPr>
-              <a:t>•  Desde el lado azul, escribe una regla de firewall/IDS que detecte un túnel SOCKS sospechoso.</a:t>
+              <a:t>•  OpenSSH (cliente y servidor).</a:t>
+            </a:r>
+          </a:p>
+          <a:p>
+            <a:pPr>
+              <a:spcAft>
+                <a:spcPts val="600"/>
+              </a:spcAft>
+            </a:pPr>
+            <a:r>
+              <a:rPr sz="1500">
+                <a:solidFill>
+                  <a:srgbClr val="22282E"/>
+                </a:solidFill>
+              </a:rPr>
+              <a:t>•  proxychains-ng: sudo apt install proxychains4.</a:t>
+            </a:r>
+          </a:p>
+          <a:p>
+            <a:pPr>
+              <a:spcAft>
+                <a:spcPts val="600"/>
+              </a:spcAft>
+            </a:pPr>
+            <a:r>
+              <a:rPr sz="1500">
+                <a:solidFill>
+                  <a:srgbClr val="22282E"/>
+                </a:solidFill>
+              </a:rPr>
+              <a:t>•  Chisel (túneles sobre HTTP/WebSocket) y socat para casos sin SSH.</a:t>
+            </a:r>
+          </a:p>
+          <a:p>
+            <a:pPr>
+              <a:spcAft>
+                <a:spcPts val="600"/>
+              </a:spcAft>
+            </a:pPr>
+            <a:r>
+              <a:rPr sz="1500">
+                <a:solidFill>
+                  <a:srgbClr val="22282E"/>
+                </a:solidFill>
+              </a:rPr>
+              <a:t>•  Laboratorio: atacante → host pivote (con dos interfaces) → red interna con una víctima solo alcanzable desde el pivote.</a:t>
             </a:r>
           </a:p>
         </p:txBody>
@@ -4748,7 +5109,7 @@
                   <a:srgbClr val="0B3D2E"/>
                 </a:solidFill>
               </a:rPr>
-              <a:t>📝 Reto verificable</a:t>
+              <a:t>🧪 Laboratorio guiado</a:t>
             </a:r>
           </a:p>
         </p:txBody>
@@ -4786,22 +5147,97 @@
                   <a:srgbClr val="22282E"/>
                 </a:solidFill>
               </a:rPr>
-              <a:t>•  Partiendo de un host pivote con dos interfaces (una hacia ti, otra hacia una red interna aislada), establece un túnel que te permita escanear y acceder a un servicio de la red interna que no es alcanzable directamente. Entrega los comandos usados, evidencia del escaneo a través del túnel y una explicación del camino que sigue un paquete desde tu máquina hasta la víctima interna.</a:t>
-            </a:r>
-          </a:p>
-          <a:p>
-            <a:pPr>
-              <a:spcAft>
-                <a:spcPts val="600"/>
-              </a:spcAft>
-            </a:pPr>
-            <a:r>
-              <a:rPr sz="1500">
-                <a:solidFill>
-                  <a:srgbClr val="22282E"/>
-                </a:solidFill>
-              </a:rPr>
-              <a:t>•  Criterio de aceptación: demuestras acceso a un servicio interno inaccesible sin el túnel, el escaneo por proxychains devuelve puertos de la red interna, y la explicación del recorrido del paquete es correcta (atacante → SOCKS local → SSH → pivote → red interna).</a:t>
+              <a:t>•  Port forwarding local (-L): accede a un servicio del pivote/red interna como si fuera local:</a:t>
+            </a:r>
+          </a:p>
+          <a:p>
+            <a:pPr>
+              <a:spcAft>
+                <a:spcPts val="600"/>
+              </a:spcAft>
+            </a:pPr>
+            <a:r>
+              <a:rPr sz="1500">
+                <a:solidFill>
+                  <a:srgbClr val="22282E"/>
+                </a:solidFill>
+              </a:rPr>
+              <a:t>•  Port forwarding remoto (-R): expón un servicio tuyo en el pivote (útil para reverse shells controladas):</a:t>
+            </a:r>
+          </a:p>
+          <a:p>
+            <a:pPr>
+              <a:spcAft>
+                <a:spcPts val="600"/>
+              </a:spcAft>
+            </a:pPr>
+            <a:r>
+              <a:rPr sz="1500">
+                <a:solidFill>
+                  <a:srgbClr val="22282E"/>
+                </a:solidFill>
+              </a:rPr>
+              <a:t>•  Túnel dinámico SOCKS (-D):</a:t>
+            </a:r>
+          </a:p>
+          <a:p>
+            <a:pPr>
+              <a:spcAft>
+                <a:spcPts val="600"/>
+              </a:spcAft>
+            </a:pPr>
+            <a:r>
+              <a:rPr sz="1500">
+                <a:solidFill>
+                  <a:srgbClr val="22282E"/>
+                </a:solidFill>
+              </a:rPr>
+              <a:t>•  Configura proxychains (/etc/proxychains4.conf):</a:t>
+            </a:r>
+          </a:p>
+          <a:p>
+            <a:pPr>
+              <a:spcAft>
+                <a:spcPts val="600"/>
+              </a:spcAft>
+            </a:pPr>
+            <a:r>
+              <a:rPr sz="1500">
+                <a:solidFill>
+                  <a:srgbClr val="22282E"/>
+                </a:solidFill>
+              </a:rPr>
+              <a:t>•  Enruta herramientas por el túnel para alcanzar la red interna:</a:t>
+            </a:r>
+          </a:p>
+          <a:p>
+            <a:pPr>
+              <a:spcAft>
+                <a:spcPts val="600"/>
+              </a:spcAft>
+            </a:pPr>
+            <a:r>
+              <a:rPr sz="1500">
+                <a:solidFill>
+                  <a:srgbClr val="22282E"/>
+                </a:solidFill>
+              </a:rPr>
+              <a:t>•  Pivote sin SSH con Chisel (esquema): en el pivote chisel server -p 8000 --reverse; en el atacante chisel client &lt;pivote&gt;:8000 R:socks para obtener un SOCKS.</a:t>
+            </a:r>
+          </a:p>
+          <a:p>
+            <a:pPr>
+              <a:spcAft>
+                <a:spcPts val="600"/>
+              </a:spcAft>
+            </a:pPr>
+            <a:r>
+              <a:rPr sz="1500">
+                <a:solidFill>
+                  <a:srgbClr val="22282E"/>
+                </a:solidFill>
+              </a:rPr>
+              <a:t>•  Lado defensivo: en el pivote, detecta el túnel observando conexiones anómalas:</a:t>
             </a:r>
           </a:p>
         </p:txBody>
